--- a/courses/COLL150-Fall26/Slides/Unit 5 - Loss Function Gradient and Descent.pptx
+++ b/courses/COLL150-Fall26/Slides/Unit 5 - Loss Function Gradient and Descent.pptx
@@ -6589,26 +6589,6 @@
             </a:r>
             <a:endParaRPr lang="en-US" sz="1300" dirty="0"/>
           </a:p>
-          <a:p>
-            <a:pPr marL="0" indent="0">
-              <a:lnSpc>
-                <a:spcPts val="2200"/>
-              </a:lnSpc>
-              <a:buNone/>
-            </a:pPr>
-            <a:r>
-              <a:rPr lang="en-US" sz="1300" dirty="0">
-                <a:solidFill>
-                  <a:srgbClr val="F2F4F8"/>
-                </a:solidFill>
-                <a:latin typeface="Calibri" pitchFamily="34" charset="0"/>
-                <a:ea typeface="Calibri" pitchFamily="34" charset="-122"/>
-                <a:cs typeface="Calibri" pitchFamily="34" charset="-120"/>
-              </a:rPr>
-              <a:t>Session length: 5 hours, with four breaks</a:t>
-            </a:r>
-            <a:endParaRPr lang="en-US" sz="1300" dirty="0"/>
-          </a:p>
         </p:txBody>
       </p:sp>
       <p:sp>
@@ -15721,7 +15701,7 @@
                 <a:ea typeface="Cambria Math" pitchFamily="34" charset="-122"/>
                 <a:cs typeface="Cambria Math" pitchFamily="34" charset="-120"/>
               </a:rPr>
-              <a:t>C₀ = ∑ⱼ (aⱼ − yⱼ)²</a:t>
+              <a:t>C₀ = ∑ⱼ 1/2(aⱼ − yⱼ)²</a:t>
             </a:r>
             <a:endParaRPr lang="en-US" sz="3800" dirty="0"/>
           </a:p>
@@ -16587,7 +16567,7 @@
                 <a:ea typeface="Cambria Math" pitchFamily="34" charset="-122"/>
                 <a:cs typeface="Cambria Math" pitchFamily="34" charset="-120"/>
               </a:rPr>
-              <a:t>C(θ) = (1/n) ∑ᵢ Cᵢ(θ)</a:t>
+              <a:t>C(θ) = (1/n) ∑ᵢ 1/2Cᵢ(θ)</a:t>
             </a:r>
             <a:endParaRPr lang="en-US" sz="3600" dirty="0"/>
           </a:p>
@@ -18698,7 +18678,7 @@
                 <a:ea typeface="Calibri" pitchFamily="34" charset="-122"/>
                 <a:cs typeface="Calibri" pitchFamily="34" charset="-120"/>
               </a:rPr>
-              <a:t>Checkpoint one — say this back before we continue</a:t>
+              <a:t>Checkpoint</a:t>
             </a:r>
             <a:endParaRPr lang="en-US" sz="1150" dirty="0"/>
           </a:p>
@@ -39536,40 +39516,6 @@
       </p:sp>
       <p:sp>
         <p:nvSpPr>
-          <p:cNvPr id="17" name="Shape 15"/>
-          <p:cNvSpPr/>
-          <p:nvPr/>
-        </p:nvSpPr>
-        <p:spPr>
-          <a:xfrm>
-            <a:off x="640080" y="4800600"/>
-            <a:ext cx="5943600" cy="777240"/>
-          </a:xfrm>
-          <a:prstGeom prst="roundRect">
-            <a:avLst>
-              <a:gd name="adj" fmla="val 9412"/>
-            </a:avLst>
-          </a:prstGeom>
-          <a:solidFill>
-            <a:srgbClr val="FAF0DE"/>
-          </a:solidFill>
-          <a:ln w="12700">
-            <a:solidFill>
-              <a:srgbClr val="FAF0DE"/>
-            </a:solidFill>
-            <a:prstDash val="solid"/>
-          </a:ln>
-        </p:spPr>
-        <p:txBody>
-          <a:bodyPr/>
-          <a:lstStyle/>
-          <a:p>
-            <a:endParaRPr lang="en-US"/>
-          </a:p>
-        </p:txBody>
-      </p:sp>
-      <p:sp>
-        <p:nvSpPr>
           <p:cNvPr id="18" name="Text 16"/>
           <p:cNvSpPr txBox="1"/>
           <p:nvPr/>
@@ -39592,17 +39538,6 @@
             <a:pPr marL="0" indent="0">
               <a:buNone/>
             </a:pPr>
-            <a:r>
-              <a:rPr lang="en-US" sz="1450" dirty="0">
-                <a:solidFill>
-                  <a:srgbClr val="111722"/>
-                </a:solidFill>
-                <a:latin typeface="Cambria" pitchFamily="34" charset="0"/>
-                <a:ea typeface="Cambria" pitchFamily="34" charset="-122"/>
-                <a:cs typeface="Cambria" pitchFamily="34" charset="-120"/>
-              </a:rPr>
-              <a:t>Show the clip. It is under a minute and it does more work than this slide.</a:t>
-            </a:r>
             <a:endParaRPr lang="en-US" sz="1450" dirty="0"/>
           </a:p>
         </p:txBody>
@@ -42028,7 +41963,7 @@
                 <a:ea typeface="Cambria" pitchFamily="34" charset="-122"/>
                 <a:cs typeface="Cambria" pitchFamily="34" charset="-120"/>
               </a:rPr>
-              <a:t>Note where three hours of mathematics sits: entirely inside the first box. Everything we built today is the machinery that turns a wrong C from a mistake into a catastrophe — because gradient descent is very good at its job, and its job is defined by C alone.</a:t>
+              <a:t>Math sits: entirely inside the first box. Everything we built today is the machinery that turns a wrong C from a mistake into a catastrophe — because gradient descent is very good at its job, and its job is defined by C alone.</a:t>
             </a:r>
             <a:endParaRPr lang="en-US" sz="1500" dirty="0"/>
           </a:p>
@@ -43067,7 +43002,7 @@
                 <a:ea typeface="Calibri" pitchFamily="34" charset="-122"/>
                 <a:cs typeface="Calibri" pitchFamily="34" charset="-120"/>
               </a:rPr>
-              <a:t>DISCUSSION · PAIRS · EIGHT MINUTES</a:t>
+              <a:t>DISCUSSION</a:t>
             </a:r>
             <a:endParaRPr lang="en-US" sz="1100" dirty="0"/>
           </a:p>
@@ -45752,10 +45687,9 @@
                   <a:srgbClr val="E9AC53"/>
                 </a:solidFill>
                 <a:latin typeface="Calibri" pitchFamily="34" charset="0"/>
-                <a:ea typeface="Calibri" pitchFamily="34" charset="-122"/>
                 <a:cs typeface="Calibri" pitchFamily="34" charset="-120"/>
               </a:rPr>
-              <a:t>The answer worth defending</a:t>
+              <a:t>One Observation</a:t>
             </a:r>
             <a:endParaRPr lang="en-US" sz="1150" dirty="0"/>
           </a:p>
@@ -45893,10 +45827,9 @@
                   <a:srgbClr val="E9AC53"/>
                 </a:solidFill>
                 <a:latin typeface="Calibri" pitchFamily="34" charset="0"/>
-                <a:ea typeface="Calibri" pitchFamily="34" charset="-122"/>
                 <a:cs typeface="Calibri" pitchFamily="34" charset="-120"/>
               </a:rPr>
-              <a:t>GROUP WORK · FOUR GROUPS · TEN MINUTES, THEN REPORT</a:t>
+              <a:t>Remark</a:t>
             </a:r>
             <a:endParaRPr lang="en-US" sz="1100" dirty="0"/>
           </a:p>
@@ -46662,79 +46595,6 @@
               <a:t>Rewrite Cᵥ with the missing terms added. Say which of the added terms could actually be measured, and what happens to the ones that cannot.</a:t>
             </a:r>
             <a:endParaRPr lang="en-US" sz="1250" dirty="0"/>
-          </a:p>
-        </p:txBody>
-      </p:sp>
-      <p:sp>
-        <p:nvSpPr>
-          <p:cNvPr id="25" name="Shape 23"/>
-          <p:cNvSpPr/>
-          <p:nvPr/>
-        </p:nvSpPr>
-        <p:spPr>
-          <a:xfrm>
-            <a:off x="640080" y="4983480"/>
-            <a:ext cx="10911535" cy="1005840"/>
-          </a:xfrm>
-          <a:prstGeom prst="roundRect">
-            <a:avLst>
-              <a:gd name="adj" fmla="val 7273"/>
-            </a:avLst>
-          </a:prstGeom>
-          <a:solidFill>
-            <a:srgbClr val="2C5FA8"/>
-          </a:solidFill>
-          <a:ln w="12700">
-            <a:solidFill>
-              <a:srgbClr val="2C5FA8"/>
-            </a:solidFill>
-            <a:prstDash val="solid"/>
-          </a:ln>
-        </p:spPr>
-        <p:txBody>
-          <a:bodyPr/>
-          <a:lstStyle/>
-          <a:p>
-            <a:endParaRPr lang="en-US"/>
-          </a:p>
-        </p:txBody>
-      </p:sp>
-      <p:sp>
-        <p:nvSpPr>
-          <p:cNvPr id="26" name="Text 24"/>
-          <p:cNvSpPr txBox="1"/>
-          <p:nvPr/>
-        </p:nvSpPr>
-        <p:spPr>
-          <a:xfrm>
-            <a:off x="1005840" y="4983480"/>
-            <a:ext cx="10424160" cy="1005840"/>
-          </a:xfrm>
-          <a:prstGeom prst="rect">
-            <a:avLst/>
-          </a:prstGeom>
-          <a:noFill/>
-          <a:ln/>
-        </p:spPr>
-        <p:txBody>
-          <a:bodyPr wrap="square" lIns="0" tIns="0" rIns="0" bIns="0" rtlCol="0" anchor="ctr"/>
-          <a:lstStyle/>
-          <a:p>
-            <a:pPr marL="0" indent="0">
-              <a:buNone/>
-            </a:pPr>
-            <a:r>
-              <a:rPr lang="en-US" sz="1600" b="1" dirty="0">
-                <a:solidFill>
-                  <a:srgbClr val="FFFFFF"/>
-                </a:solidFill>
-                <a:latin typeface="Cambria" pitchFamily="34" charset="0"/>
-                <a:ea typeface="Cambria" pitchFamily="34" charset="-122"/>
-                <a:cs typeface="Cambria" pitchFamily="34" charset="-120"/>
-              </a:rPr>
-              <a:t>Two minutes each. Every group names one thing their C leaves out, and says what optimisation pressure would do to it.</a:t>
-            </a:r>
-            <a:endParaRPr lang="en-US" sz="1600" dirty="0"/>
           </a:p>
         </p:txBody>
       </p:sp>
@@ -52056,7 +51916,7 @@
                 <a:ea typeface="Calibri" pitchFamily="34" charset="-122"/>
                 <a:cs typeface="Calibri" pitchFamily="34" charset="-120"/>
               </a:rPr>
-              <a:t>The rule for the rest of the day</a:t>
+              <a:t>Comment</a:t>
             </a:r>
             <a:endParaRPr lang="en-US" sz="1150" dirty="0"/>
           </a:p>
